--- a/dist/초2/국어/기초문해/초2_국어_기초문해_01_소리와글자가다른낱말.pptx
+++ b/dist/초2/국어/기초문해/초2_국어_기초문해_01_소리와글자가다른낱말.pptx
@@ -119,39 +119,39 @@
   <p:extLst>
     <p:ext uri="{521415D9-36F7-43E2-AB2F-B90AF26B5E84}">
       <p14:sectionLst xmlns:p14="http://schemas.microsoft.com/office/powerpoint/2010/main">
-        <p14:section name="도입" id="{752c9a03-3167-6cb9-3d23-0fa398585c8b}">
+        <p14:section name="도입" id="{a250197c-3f4a-c333-bc06-433224ad0b33}">
           <p14:sldIdLst>
             <p14:sldId id="256"/>
             <p14:sldId id="257"/>
           </p14:sldIdLst>
         </p14:section>
-        <p14:section name="개념" id="{94c1c1b1-8128-b134-a5cc-2777aed18965}">
+        <p14:section name="개념" id="{c669a148-e947-3fd4-07bd-edc8b4a46e7b}">
           <p14:sldIdLst>
             <p14:sldId id="258"/>
             <p14:sldId id="259"/>
             <p14:sldId id="260"/>
           </p14:sldIdLst>
         </p14:section>
-        <p14:section name="연습" id="{349a0d81-51e6-60ad-d86a-fea0c6fb45a9}">
+        <p14:section name="연습" id="{5510754a-390c-06ce-2465-a60637e46d77}">
           <p14:sldIdLst>
             <p14:sldId id="261"/>
             <p14:sldId id="262"/>
             <p14:sldId id="263"/>
           </p14:sldIdLst>
         </p14:section>
-        <p14:section name="확인" id="{7074202c-8865-2295-296f-78fb7f55f27f}">
+        <p14:section name="확인" id="{fe825264-ab56-527f-9bde-c5dd9945b9a7}">
           <p14:sldIdLst>
             <p14:sldId id="264"/>
             <p14:sldId id="265"/>
             <p14:sldId id="266"/>
           </p14:sldIdLst>
         </p14:section>
-        <p14:section name="정리" id="{5a2fff69-2c7a-b081-8d0a-64cedb66f17c}">
+        <p14:section name="정리" id="{a4332143-b4b9-4214-42c0-07ee35227e93}">
           <p14:sldIdLst>
             <p14:sldId id="267"/>
           </p14:sldIdLst>
         </p14:section>
-        <p14:section name="보충" id="{82a01668-4242-d46a-d42d-c05b4853a7f4}">
+        <p14:section name="보충" id="{ae231295-8db9-5f11-ff38-23916ecbdf94}">
           <p14:sldIdLst>
             <p14:sldId id="268"/>
           </p14:sldIdLst>
@@ -568,6 +568,8 @@
 - “글자는 ‘음악’인데 말할 때는 [으막]이라고 해. 오늘은 이렇게 글자와 소리가 다른 낱말을 배울 거야.”
 예상 답
 - “음악이요.” (글자대로 [음-악]처럼 끊어 읽을 수도 있습니다.)
+막히면
+- 부모가 ‘음악’을 평소처럼 말해 들려주고 “어떻게 들려?”라고 묻습니다.
 주의
 - 노트의 [ ] 안은 소리 나는 대로 적은 것입니다(표준 발음). 부모가 평소 말하듯 자연스럽게 들려줍니다.
 - 끊어 읽어도 고치지 말고 들어 둡니다. S03에서 다룹니다.</a:t>
@@ -864,7 +866,9 @@
 예상 답
 - “받침이 뒤로 넘어가서 소리 나지만, 쓸 때는 앞 글자에 써요.”
 정답
-- ① 음악 ② [노리] ③ 밥을</a:t>
+- ① 음악 ② [노리] ③ 밥을
+막히면
+- ①③을 어려워하면 S05의 ‘떼어 보기’ 카드를 다시 보여 줍니다.</a:t>
             </a:r>
             <a:endParaRPr lang="en-US" dirty="0"/>
           </a:p>

--- a/dist/초2/국어/기초문해/초2_국어_기초문해_01_소리와글자가다른낱말.pptx
+++ b/dist/초2/국어/기초문해/초2_국어_기초문해_01_소리와글자가다른낱말.pptx
@@ -119,39 +119,39 @@
   <p:extLst>
     <p:ext uri="{521415D9-36F7-43E2-AB2F-B90AF26B5E84}">
       <p14:sectionLst xmlns:p14="http://schemas.microsoft.com/office/powerpoint/2010/main">
-        <p14:section name="도입" id="{a250197c-3f4a-c333-bc06-433224ad0b33}">
+        <p14:section name="도입" id="{4a9f0e4b-8d26-4f2a-b329-2b966efd4e79}">
           <p14:sldIdLst>
             <p14:sldId id="256"/>
             <p14:sldId id="257"/>
           </p14:sldIdLst>
         </p14:section>
-        <p14:section name="개념" id="{c669a148-e947-3fd4-07bd-edc8b4a46e7b}">
+        <p14:section name="개념" id="{66514255-a2b0-1831-a405-e66e401c1ca5}">
           <p14:sldIdLst>
             <p14:sldId id="258"/>
             <p14:sldId id="259"/>
             <p14:sldId id="260"/>
           </p14:sldIdLst>
         </p14:section>
-        <p14:section name="연습" id="{5510754a-390c-06ce-2465-a60637e46d77}">
+        <p14:section name="연습" id="{6e429239-ce69-cb98-b0b2-66bb37db6f21}">
           <p14:sldIdLst>
             <p14:sldId id="261"/>
             <p14:sldId id="262"/>
             <p14:sldId id="263"/>
           </p14:sldIdLst>
         </p14:section>
-        <p14:section name="확인" id="{fe825264-ab56-527f-9bde-c5dd9945b9a7}">
+        <p14:section name="확인" id="{4f8ff659-91e0-b58f-6761-6f6e6b52c1aa}">
           <p14:sldIdLst>
             <p14:sldId id="264"/>
             <p14:sldId id="265"/>
             <p14:sldId id="266"/>
           </p14:sldIdLst>
         </p14:section>
-        <p14:section name="정리" id="{a4332143-b4b9-4214-42c0-07ee35227e93}">
+        <p14:section name="정리" id="{2e8889b6-f87c-d29c-8853-786bbfcc52e3}">
           <p14:sldIdLst>
             <p14:sldId id="267"/>
           </p14:sldIdLst>
         </p14:section>
-        <p14:section name="보충" id="{ae231295-8db9-5f11-ff38-23916ecbdf94}">
+        <p14:section name="보충" id="{55cc2f43-7e0d-9c4a-6ede-0faa7b0300bd}">
           <p14:sldIdLst>
             <p14:sldId id="268"/>
           </p14:sldIdLst>
@@ -2858,7 +2858,7 @@
               <a:buNone/>
             </a:pPr>
             <a:r>
-              <a:rPr lang="ko-KR" altLang="en-US" sz="5000" b="1" dirty="0">
+              <a:rPr lang="ko-KR" altLang="en-US" sz="4400" b="1" dirty="0">
                 <a:solidFill>
                   <a:srgbClr val="FFFFFF"/>
                 </a:solidFill>
